--- a/wada-tue-scoping-review/manuscripts/individual_figures/Figure_5.pptx
+++ b/wada-tue-scoping-review/manuscripts/individual_figures/Figure_5.pptx
@@ -3096,7 +3096,7 @@
         </p:nvSpPr>
         <p:spPr>
           <a:xfrm>
-            <a:off x="457200" y="182880"/>
+            <a:off x="457200" y="91440"/>
             <a:ext cx="11247120" cy="548640"/>
           </a:xfrm>
           <a:prstGeom prst="rect">
@@ -3112,36 +3112,782 @@
           <a:p>
             <a:pPr algn="ctr"/>
             <a:r>
-              <a:rPr b="1" sz="2400"/>
-              <a:t>Figure 5</a:t>
-            </a:r>
-          </a:p>
-        </p:txBody>
-      </p:sp>
-      <p:pic>
-        <p:nvPicPr>
-          <p:cNvPr id="3" name="Picture 2" descr="fig5_severity_bar.png"/>
-          <p:cNvPicPr>
-            <a:picLocks noChangeAspect="1"/>
-          </p:cNvPicPr>
+              <a:rPr b="1" sz="2000">
+                <a:solidFill>
+                  <a:srgbClr val="1B3A5C"/>
+                </a:solidFill>
+              </a:rPr>
+              <a:t>Figure 5. Clinical-Competition Gap Severity
+by Disease Area and Assessment Dimension</a:t>
+            </a:r>
+          </a:p>
+        </p:txBody>
+      </p:sp>
+      <p:graphicFrame>
+        <p:nvGraphicFramePr>
+          <p:cNvPr id="3" name="Table 2"/>
+          <p:cNvGraphicFramePr>
+            <a:graphicFrameLocks noGrp="1"/>
+          </p:cNvGraphicFramePr>
           <p:nvPr/>
-        </p:nvPicPr>
-        <p:blipFill>
-          <a:blip r:embed="rId2"/>
-          <a:stretch>
-            <a:fillRect/>
-          </a:stretch>
-        </p:blipFill>
-        <p:spPr>
-          <a:xfrm>
-            <a:off x="1848563" y="914400"/>
-            <a:ext cx="8494568" cy="4572000"/>
-          </a:xfrm>
-          <a:prstGeom prst="rect">
-            <a:avLst/>
-          </a:prstGeom>
-        </p:spPr>
-      </p:pic>
+        </p:nvGraphicFramePr>
+        <p:xfrm>
+          <a:off x="914400" y="1188720"/>
+          <a:ext cx="10332720" cy="4389120"/>
+        </p:xfrm>
+        <a:graphic>
+          <a:graphicData uri="http://schemas.openxmlformats.org/drawingml/2006/table">
+            <a:tbl>
+              <a:tblPr firstRow="1" bandRow="1">
+                <a:tableStyleId>{5C22544A-7EE6-4342-B048-85BDC9FD1C3A}</a:tableStyleId>
+              </a:tblPr>
+              <a:tblGrid>
+                <a:gridCol w="3017520"/>
+                <a:gridCol w="1828800"/>
+                <a:gridCol w="1828800"/>
+                <a:gridCol w="1828800"/>
+                <a:gridCol w="1828800"/>
+              </a:tblGrid>
+              <a:tr h="548640">
+                <a:tc>
+                  <a:txBody>
+                    <a:bodyPr/>
+                    <a:lstStyle/>
+                    <a:p>
+                      <a:pPr algn="ctr"/>
+                      <a:r>
+                        <a:rPr sz="900" b="1"/>
+                        <a:t>Disease Area</a:t>
+                      </a:r>
+                    </a:p>
+                  </a:txBody>
+                  <a:tcPr anchor="ctr">
+                    <a:solidFill>
+                      <a:srgbClr val="E3F2FD"/>
+                    </a:solidFill>
+                  </a:tcPr>
+                </a:tc>
+                <a:tc>
+                  <a:txBody>
+                    <a:bodyPr/>
+                    <a:lstStyle/>
+                    <a:p>
+                      <a:pPr algn="ctr"/>
+                      <a:r>
+                        <a:rPr sz="900" b="1"/>
+                        <a:t>First-line Rx</a:t>
+                      </a:r>
+                    </a:p>
+                    <a:p>
+                      <a:pPr algn="ctr"/>
+                      <a:r>
+                        <a:rPr sz="900" b="1"/>
+                        <a:t>Prohibited</a:t>
+                      </a:r>
+                    </a:p>
+                  </a:txBody>
+                  <a:tcPr anchor="ctr">
+                    <a:solidFill>
+                      <a:srgbClr val="E3F2FD"/>
+                    </a:solidFill>
+                  </a:tcPr>
+                </a:tc>
+                <a:tc>
+                  <a:txBody>
+                    <a:bodyPr/>
+                    <a:lstStyle/>
+                    <a:p>
+                      <a:pPr algn="ctr"/>
+                      <a:r>
+                        <a:rPr sz="900" b="1"/>
+                        <a:t>TUE Process</a:t>
+                      </a:r>
+                    </a:p>
+                    <a:p>
+                      <a:pPr algn="ctr"/>
+                      <a:r>
+                        <a:rPr sz="900" b="1"/>
+                        <a:t>Complexity</a:t>
+                      </a:r>
+                    </a:p>
+                  </a:txBody>
+                  <a:tcPr anchor="ctr">
+                    <a:solidFill>
+                      <a:srgbClr val="E3F2FD"/>
+                    </a:solidFill>
+                  </a:tcPr>
+                </a:tc>
+                <a:tc>
+                  <a:txBody>
+                    <a:bodyPr/>
+                    <a:lstStyle/>
+                    <a:p>
+                      <a:pPr algn="ctr"/>
+                      <a:r>
+                        <a:rPr sz="900" b="1"/>
+                        <a:t>Guideline</a:t>
+                      </a:r>
+                    </a:p>
+                    <a:p>
+                      <a:pPr algn="ctr"/>
+                      <a:r>
+                        <a:rPr sz="900" b="1"/>
+                        <a:t>Update Lag</a:t>
+                      </a:r>
+                    </a:p>
+                  </a:txBody>
+                  <a:tcPr anchor="ctr">
+                    <a:solidFill>
+                      <a:srgbClr val="E3F2FD"/>
+                    </a:solidFill>
+                  </a:tcPr>
+                </a:tc>
+                <a:tc>
+                  <a:txBody>
+                    <a:bodyPr/>
+                    <a:lstStyle/>
+                    <a:p>
+                      <a:pPr algn="ctr"/>
+                      <a:r>
+                        <a:rPr sz="900" b="1"/>
+                        <a:t>Athlete</a:t>
+                      </a:r>
+                    </a:p>
+                    <a:p>
+                      <a:pPr algn="ctr"/>
+                      <a:r>
+                        <a:rPr sz="900" b="1"/>
+                        <a:t>Impact</a:t>
+                      </a:r>
+                    </a:p>
+                  </a:txBody>
+                  <a:tcPr anchor="ctr">
+                    <a:solidFill>
+                      <a:srgbClr val="E3F2FD"/>
+                    </a:solidFill>
+                  </a:tcPr>
+                </a:tc>
+              </a:tr>
+              <a:tr h="548640">
+                <a:tc>
+                  <a:txBody>
+                    <a:bodyPr/>
+                    <a:lstStyle/>
+                    <a:p>
+                      <a:pPr algn="ctr"/>
+                      <a:r>
+                        <a:rPr sz="1000" b="1"/>
+                        <a:t>Male Hypogonadism</a:t>
+                      </a:r>
+                    </a:p>
+                  </a:txBody>
+                  <a:tcPr anchor="ctr"/>
+                </a:tc>
+                <a:tc>
+                  <a:txBody>
+                    <a:bodyPr/>
+                    <a:lstStyle/>
+                    <a:p>
+                      <a:pPr algn="ctr"/>
+                      <a:r>
+                        <a:rPr sz="1000" b="0"/>
+                        <a:t>Very High (4)</a:t>
+                      </a:r>
+                    </a:p>
+                  </a:txBody>
+                  <a:tcPr anchor="ctr">
+                    <a:solidFill>
+                      <a:srgbClr val="EF5350"/>
+                    </a:solidFill>
+                  </a:tcPr>
+                </a:tc>
+                <a:tc>
+                  <a:txBody>
+                    <a:bodyPr/>
+                    <a:lstStyle/>
+                    <a:p>
+                      <a:pPr algn="ctr"/>
+                      <a:r>
+                        <a:rPr sz="1000" b="0"/>
+                        <a:t>Very High (4)</a:t>
+                      </a:r>
+                    </a:p>
+                  </a:txBody>
+                  <a:tcPr anchor="ctr">
+                    <a:solidFill>
+                      <a:srgbClr val="FF9800"/>
+                    </a:solidFill>
+                  </a:tcPr>
+                </a:tc>
+                <a:tc>
+                  <a:txBody>
+                    <a:bodyPr/>
+                    <a:lstStyle/>
+                    <a:p>
+                      <a:pPr algn="ctr"/>
+                      <a:r>
+                        <a:rPr sz="1000" b="0"/>
+                        <a:t>High (3)</a:t>
+                      </a:r>
+                    </a:p>
+                  </a:txBody>
+                  <a:tcPr anchor="ctr">
+                    <a:solidFill>
+                      <a:srgbClr val="FDE167"/>
+                    </a:solidFill>
+                  </a:tcPr>
+                </a:tc>
+                <a:tc>
+                  <a:txBody>
+                    <a:bodyPr/>
+                    <a:lstStyle/>
+                    <a:p>
+                      <a:pPr algn="ctr"/>
+                      <a:r>
+                        <a:rPr sz="1000" b="0"/>
+                        <a:t>Very High (4)</a:t>
+                      </a:r>
+                    </a:p>
+                  </a:txBody>
+                  <a:tcPr anchor="ctr">
+                    <a:solidFill>
+                      <a:srgbClr val="42A5F5"/>
+                    </a:solidFill>
+                  </a:tcPr>
+                </a:tc>
+              </a:tr>
+              <a:tr h="548640">
+                <a:tc>
+                  <a:txBody>
+                    <a:bodyPr/>
+                    <a:lstStyle/>
+                    <a:p>
+                      <a:pPr algn="ctr"/>
+                      <a:r>
+                        <a:rPr sz="1000" b="1"/>
+                        <a:t>ADHD</a:t>
+                      </a:r>
+                    </a:p>
+                  </a:txBody>
+                  <a:tcPr anchor="ctr"/>
+                </a:tc>
+                <a:tc>
+                  <a:txBody>
+                    <a:bodyPr/>
+                    <a:lstStyle/>
+                    <a:p>
+                      <a:pPr algn="ctr"/>
+                      <a:r>
+                        <a:rPr sz="1000" b="0"/>
+                        <a:t>Very High (4)</a:t>
+                      </a:r>
+                    </a:p>
+                  </a:txBody>
+                  <a:tcPr anchor="ctr">
+                    <a:solidFill>
+                      <a:srgbClr val="EF5350"/>
+                    </a:solidFill>
+                  </a:tcPr>
+                </a:tc>
+                <a:tc>
+                  <a:txBody>
+                    <a:bodyPr/>
+                    <a:lstStyle/>
+                    <a:p>
+                      <a:pPr algn="ctr"/>
+                      <a:r>
+                        <a:rPr sz="1000" b="0"/>
+                        <a:t>Very High (4)</a:t>
+                      </a:r>
+                    </a:p>
+                  </a:txBody>
+                  <a:tcPr anchor="ctr">
+                    <a:solidFill>
+                      <a:srgbClr val="FF9800"/>
+                    </a:solidFill>
+                  </a:tcPr>
+                </a:tc>
+                <a:tc>
+                  <a:txBody>
+                    <a:bodyPr/>
+                    <a:lstStyle/>
+                    <a:p>
+                      <a:pPr algn="ctr"/>
+                      <a:r>
+                        <a:rPr sz="1000" b="0"/>
+                        <a:t>Medium (2)</a:t>
+                      </a:r>
+                    </a:p>
+                  </a:txBody>
+                  <a:tcPr anchor="ctr">
+                    <a:solidFill>
+                      <a:srgbClr val="FEEB9A"/>
+                    </a:solidFill>
+                  </a:tcPr>
+                </a:tc>
+                <a:tc>
+                  <a:txBody>
+                    <a:bodyPr/>
+                    <a:lstStyle/>
+                    <a:p>
+                      <a:pPr algn="ctr"/>
+                      <a:r>
+                        <a:rPr sz="1000" b="0"/>
+                        <a:t>Very High (4)</a:t>
+                      </a:r>
+                    </a:p>
+                  </a:txBody>
+                  <a:tcPr anchor="ctr">
+                    <a:solidFill>
+                      <a:srgbClr val="42A5F5"/>
+                    </a:solidFill>
+                  </a:tcPr>
+                </a:tc>
+              </a:tr>
+              <a:tr h="548640">
+                <a:tc>
+                  <a:txBody>
+                    <a:bodyPr/>
+                    <a:lstStyle/>
+                    <a:p>
+                      <a:pPr algn="ctr"/>
+                      <a:r>
+                        <a:rPr sz="1000" b="1"/>
+                        <a:t>PCOS/Fertility</a:t>
+                      </a:r>
+                    </a:p>
+                  </a:txBody>
+                  <a:tcPr anchor="ctr"/>
+                </a:tc>
+                <a:tc>
+                  <a:txBody>
+                    <a:bodyPr/>
+                    <a:lstStyle/>
+                    <a:p>
+                      <a:pPr algn="ctr"/>
+                      <a:r>
+                        <a:rPr sz="1000" b="0"/>
+                        <a:t>Very High (4)</a:t>
+                      </a:r>
+                    </a:p>
+                  </a:txBody>
+                  <a:tcPr anchor="ctr">
+                    <a:solidFill>
+                      <a:srgbClr val="EF5350"/>
+                    </a:solidFill>
+                  </a:tcPr>
+                </a:tc>
+                <a:tc>
+                  <a:txBody>
+                    <a:bodyPr/>
+                    <a:lstStyle/>
+                    <a:p>
+                      <a:pPr algn="ctr"/>
+                      <a:r>
+                        <a:rPr sz="1000" b="0"/>
+                        <a:t>High (3)</a:t>
+                      </a:r>
+                    </a:p>
+                  </a:txBody>
+                  <a:tcPr anchor="ctr">
+                    <a:solidFill>
+                      <a:srgbClr val="FFB13F"/>
+                    </a:solidFill>
+                  </a:tcPr>
+                </a:tc>
+                <a:tc>
+                  <a:txBody>
+                    <a:bodyPr/>
+                    <a:lstStyle/>
+                    <a:p>
+                      <a:pPr algn="ctr"/>
+                      <a:r>
+                        <a:rPr sz="1000" b="0"/>
+                        <a:t>Medium (2)</a:t>
+                      </a:r>
+                    </a:p>
+                  </a:txBody>
+                  <a:tcPr anchor="ctr">
+                    <a:solidFill>
+                      <a:srgbClr val="FEEB9A"/>
+                    </a:solidFill>
+                  </a:tcPr>
+                </a:tc>
+                <a:tc>
+                  <a:txBody>
+                    <a:bodyPr/>
+                    <a:lstStyle/>
+                    <a:p>
+                      <a:pPr algn="ctr"/>
+                      <a:r>
+                        <a:rPr sz="1000" b="0"/>
+                        <a:t>High (3)</a:t>
+                      </a:r>
+                    </a:p>
+                  </a:txBody>
+                  <a:tcPr anchor="ctr">
+                    <a:solidFill>
+                      <a:srgbClr val="71BBF7"/>
+                    </a:solidFill>
+                  </a:tcPr>
+                </a:tc>
+              </a:tr>
+              <a:tr h="548640">
+                <a:tc>
+                  <a:txBody>
+                    <a:bodyPr/>
+                    <a:lstStyle/>
+                    <a:p>
+                      <a:pPr algn="ctr"/>
+                      <a:r>
+                        <a:rPr sz="1000" b="1"/>
+                        <a:t>Cardiovascular</a:t>
+                      </a:r>
+                    </a:p>
+                  </a:txBody>
+                  <a:tcPr anchor="ctr"/>
+                </a:tc>
+                <a:tc>
+                  <a:txBody>
+                    <a:bodyPr/>
+                    <a:lstStyle/>
+                    <a:p>
+                      <a:pPr algn="ctr"/>
+                      <a:r>
+                        <a:rPr sz="1000" b="0"/>
+                        <a:t>High (3)</a:t>
+                      </a:r>
+                    </a:p>
+                  </a:txBody>
+                  <a:tcPr anchor="ctr">
+                    <a:solidFill>
+                      <a:srgbClr val="F37E7B"/>
+                    </a:solidFill>
+                  </a:tcPr>
+                </a:tc>
+                <a:tc>
+                  <a:txBody>
+                    <a:bodyPr/>
+                    <a:lstStyle/>
+                    <a:p>
+                      <a:pPr algn="ctr"/>
+                      <a:r>
+                        <a:rPr sz="1000" b="0"/>
+                        <a:t>High (3)</a:t>
+                      </a:r>
+                    </a:p>
+                  </a:txBody>
+                  <a:tcPr anchor="ctr">
+                    <a:solidFill>
+                      <a:srgbClr val="FFB13F"/>
+                    </a:solidFill>
+                  </a:tcPr>
+                </a:tc>
+                <a:tc>
+                  <a:txBody>
+                    <a:bodyPr/>
+                    <a:lstStyle/>
+                    <a:p>
+                      <a:pPr algn="ctr"/>
+                      <a:r>
+                        <a:rPr sz="1000" b="0"/>
+                        <a:t>High (3)</a:t>
+                      </a:r>
+                    </a:p>
+                  </a:txBody>
+                  <a:tcPr anchor="ctr">
+                    <a:solidFill>
+                      <a:srgbClr val="FDE167"/>
+                    </a:solidFill>
+                  </a:tcPr>
+                </a:tc>
+                <a:tc>
+                  <a:txBody>
+                    <a:bodyPr/>
+                    <a:lstStyle/>
+                    <a:p>
+                      <a:pPr algn="ctr"/>
+                      <a:r>
+                        <a:rPr sz="1000" b="0"/>
+                        <a:t>High (3)</a:t>
+                      </a:r>
+                    </a:p>
+                  </a:txBody>
+                  <a:tcPr anchor="ctr">
+                    <a:solidFill>
+                      <a:srgbClr val="71BBF7"/>
+                    </a:solidFill>
+                  </a:tcPr>
+                </a:tc>
+              </a:tr>
+              <a:tr h="548640">
+                <a:tc>
+                  <a:txBody>
+                    <a:bodyPr/>
+                    <a:lstStyle/>
+                    <a:p>
+                      <a:pPr algn="ctr"/>
+                      <a:r>
+                        <a:rPr sz="1000" b="1"/>
+                        <a:t>Glucocorticoids</a:t>
+                      </a:r>
+                    </a:p>
+                  </a:txBody>
+                  <a:tcPr anchor="ctr"/>
+                </a:tc>
+                <a:tc>
+                  <a:txBody>
+                    <a:bodyPr/>
+                    <a:lstStyle/>
+                    <a:p>
+                      <a:pPr algn="ctr"/>
+                      <a:r>
+                        <a:rPr sz="1000" b="0"/>
+                        <a:t>High (3)</a:t>
+                      </a:r>
+                    </a:p>
+                  </a:txBody>
+                  <a:tcPr anchor="ctr">
+                    <a:solidFill>
+                      <a:srgbClr val="F37E7B"/>
+                    </a:solidFill>
+                  </a:tcPr>
+                </a:tc>
+                <a:tc>
+                  <a:txBody>
+                    <a:bodyPr/>
+                    <a:lstStyle/>
+                    <a:p>
+                      <a:pPr algn="ctr"/>
+                      <a:r>
+                        <a:rPr sz="1000" b="0"/>
+                        <a:t>Medium (2)</a:t>
+                      </a:r>
+                    </a:p>
+                  </a:txBody>
+                  <a:tcPr anchor="ctr">
+                    <a:solidFill>
+                      <a:srgbClr val="FFCB7F"/>
+                    </a:solidFill>
+                  </a:tcPr>
+                </a:tc>
+                <a:tc>
+                  <a:txBody>
+                    <a:bodyPr/>
+                    <a:lstStyle/>
+                    <a:p>
+                      <a:pPr algn="ctr"/>
+                      <a:r>
+                        <a:rPr sz="1000" b="0"/>
+                        <a:t>Medium (2)</a:t>
+                      </a:r>
+                    </a:p>
+                  </a:txBody>
+                  <a:tcPr anchor="ctr">
+                    <a:solidFill>
+                      <a:srgbClr val="FEEB9A"/>
+                    </a:solidFill>
+                  </a:tcPr>
+                </a:tc>
+                <a:tc>
+                  <a:txBody>
+                    <a:bodyPr/>
+                    <a:lstStyle/>
+                    <a:p>
+                      <a:pPr algn="ctr"/>
+                      <a:r>
+                        <a:rPr sz="1000" b="0"/>
+                        <a:t>High (3)</a:t>
+                      </a:r>
+                    </a:p>
+                  </a:txBody>
+                  <a:tcPr anchor="ctr">
+                    <a:solidFill>
+                      <a:srgbClr val="71BBF7"/>
+                    </a:solidFill>
+                  </a:tcPr>
+                </a:tc>
+              </a:tr>
+              <a:tr h="548640">
+                <a:tc>
+                  <a:txBody>
+                    <a:bodyPr/>
+                    <a:lstStyle/>
+                    <a:p>
+                      <a:pPr algn="ctr"/>
+                      <a:r>
+                        <a:rPr sz="1000" b="1"/>
+                        <a:t>Asthma</a:t>
+                      </a:r>
+                    </a:p>
+                  </a:txBody>
+                  <a:tcPr anchor="ctr"/>
+                </a:tc>
+                <a:tc>
+                  <a:txBody>
+                    <a:bodyPr/>
+                    <a:lstStyle/>
+                    <a:p>
+                      <a:pPr algn="ctr"/>
+                      <a:r>
+                        <a:rPr sz="1000" b="0"/>
+                        <a:t>Medium (2)</a:t>
+                      </a:r>
+                    </a:p>
+                  </a:txBody>
+                  <a:tcPr anchor="ctr">
+                    <a:solidFill>
+                      <a:srgbClr val="F7A9A7"/>
+                    </a:solidFill>
+                  </a:tcPr>
+                </a:tc>
+                <a:tc>
+                  <a:txBody>
+                    <a:bodyPr/>
+                    <a:lstStyle/>
+                    <a:p>
+                      <a:pPr algn="ctr"/>
+                      <a:r>
+                        <a:rPr sz="1000" b="0"/>
+                        <a:t>Medium (2)</a:t>
+                      </a:r>
+                    </a:p>
+                  </a:txBody>
+                  <a:tcPr anchor="ctr">
+                    <a:solidFill>
+                      <a:srgbClr val="FFCB7F"/>
+                    </a:solidFill>
+                  </a:tcPr>
+                </a:tc>
+                <a:tc>
+                  <a:txBody>
+                    <a:bodyPr/>
+                    <a:lstStyle/>
+                    <a:p>
+                      <a:pPr algn="ctr"/>
+                      <a:r>
+                        <a:rPr sz="1000" b="0"/>
+                        <a:t>Medium (2)</a:t>
+                      </a:r>
+                    </a:p>
+                  </a:txBody>
+                  <a:tcPr anchor="ctr">
+                    <a:solidFill>
+                      <a:srgbClr val="FEEB9A"/>
+                    </a:solidFill>
+                  </a:tcPr>
+                </a:tc>
+                <a:tc>
+                  <a:txBody>
+                    <a:bodyPr/>
+                    <a:lstStyle/>
+                    <a:p>
+                      <a:pPr algn="ctr"/>
+                      <a:r>
+                        <a:rPr sz="1000" b="0"/>
+                        <a:t>High (3)</a:t>
+                      </a:r>
+                    </a:p>
+                  </a:txBody>
+                  <a:tcPr anchor="ctr">
+                    <a:solidFill>
+                      <a:srgbClr val="71BBF7"/>
+                    </a:solidFill>
+                  </a:tcPr>
+                </a:tc>
+              </a:tr>
+              <a:tr h="548640">
+                <a:tc>
+                  <a:txBody>
+                    <a:bodyPr/>
+                    <a:lstStyle/>
+                    <a:p>
+                      <a:pPr algn="ctr"/>
+                      <a:r>
+                        <a:rPr sz="1000" b="1"/>
+                        <a:t>Type 2 Diabetes / GLP-1 RA</a:t>
+                      </a:r>
+                    </a:p>
+                  </a:txBody>
+                  <a:tcPr anchor="ctr"/>
+                </a:tc>
+                <a:tc>
+                  <a:txBody>
+                    <a:bodyPr/>
+                    <a:lstStyle/>
+                    <a:p>
+                      <a:pPr algn="ctr"/>
+                      <a:r>
+                        <a:rPr sz="1000" b="0"/>
+                        <a:t>Low (1)</a:t>
+                      </a:r>
+                    </a:p>
+                  </a:txBody>
+                  <a:tcPr anchor="ctr">
+                    <a:solidFill>
+                      <a:srgbClr val="FBD4D3"/>
+                    </a:solidFill>
+                  </a:tcPr>
+                </a:tc>
+                <a:tc>
+                  <a:txBody>
+                    <a:bodyPr/>
+                    <a:lstStyle/>
+                    <a:p>
+                      <a:pPr algn="ctr"/>
+                      <a:r>
+                        <a:rPr sz="1000" b="0"/>
+                        <a:t>Medium (2)</a:t>
+                      </a:r>
+                    </a:p>
+                  </a:txBody>
+                  <a:tcPr anchor="ctr">
+                    <a:solidFill>
+                      <a:srgbClr val="FFCB7F"/>
+                    </a:solidFill>
+                  </a:tcPr>
+                </a:tc>
+                <a:tc>
+                  <a:txBody>
+                    <a:bodyPr/>
+                    <a:lstStyle/>
+                    <a:p>
+                      <a:pPr algn="ctr"/>
+                      <a:r>
+                        <a:rPr sz="1000" b="0"/>
+                        <a:t>High (3)</a:t>
+                      </a:r>
+                    </a:p>
+                  </a:txBody>
+                  <a:tcPr anchor="ctr">
+                    <a:solidFill>
+                      <a:srgbClr val="FDE167"/>
+                    </a:solidFill>
+                  </a:tcPr>
+                </a:tc>
+                <a:tc>
+                  <a:txBody>
+                    <a:bodyPr/>
+                    <a:lstStyle/>
+                    <a:p>
+                      <a:pPr algn="ctr"/>
+                      <a:r>
+                        <a:rPr sz="1000" b="0"/>
+                        <a:t>High (3)</a:t>
+                      </a:r>
+                    </a:p>
+                  </a:txBody>
+                  <a:tcPr anchor="ctr">
+                    <a:solidFill>
+                      <a:srgbClr val="71BBF7"/>
+                    </a:solidFill>
+                  </a:tcPr>
+                </a:tc>
+              </a:tr>
+            </a:tbl>
+          </a:graphicData>
+        </a:graphic>
+      </p:graphicFrame>
       <p:sp>
         <p:nvSpPr>
           <p:cNvPr id="4" name="TextBox 3"/>
@@ -3150,8 +3896,8 @@
         </p:nvSpPr>
         <p:spPr>
           <a:xfrm>
-            <a:off x="457200" y="5943600"/>
-            <a:ext cx="11247120" cy="731520"/>
+            <a:off x="914400" y="5760720"/>
+            <a:ext cx="10058400" cy="365760"/>
           </a:xfrm>
           <a:prstGeom prst="rect">
             <a:avLst/>
@@ -3159,6 +3905,36 @@
           <a:noFill/>
         </p:spPr>
         <p:txBody>
+          <a:bodyPr wrap="none">
+            <a:spAutoFit/>
+          </a:bodyPr>
+          <a:lstStyle/>
+          <a:p>
+            <a:pPr algn="ctr"/>
+            <a:r>
+              <a:rPr sz="1000" i="1"/>
+              <a:t>Severity Scale: None (0) | Low (1) | Medium (2) | High (3) | Very High (4)</a:t>
+            </a:r>
+          </a:p>
+        </p:txBody>
+      </p:sp>
+      <p:sp>
+        <p:nvSpPr>
+          <p:cNvPr id="5" name="TextBox 4"/>
+          <p:cNvSpPr txBox="1"/>
+          <p:nvPr/>
+        </p:nvSpPr>
+        <p:spPr>
+          <a:xfrm>
+            <a:off x="457200" y="6217920"/>
+            <a:ext cx="11247120" cy="548640"/>
+          </a:xfrm>
+          <a:prstGeom prst="rect">
+            <a:avLst/>
+          </a:prstGeom>
+          <a:noFill/>
+        </p:spPr>
+        <p:txBody>
           <a:bodyPr wrap="square">
             <a:spAutoFit/>
           </a:bodyPr>
@@ -3166,7 +3942,11 @@
           <a:p>
             <a:pPr algn="ctr"/>
             <a:r>
-              <a:rPr sz="1400" i="1"/>
+              <a:rPr sz="1200" i="1">
+                <a:solidFill>
+                  <a:srgbClr val="424242"/>
+                </a:solidFill>
+              </a:rPr>
               <a:t>Figure 5. Clinical-competition gap severity by disease area and assessment dimension.</a:t>
             </a:r>
           </a:p>

--- a/wada-tue-scoping-review/manuscripts/individual_figures/Figure_5.pptx
+++ b/wada-tue-scoping-review/manuscripts/individual_figures/Figure_5.pptx
@@ -105,6 +105,401 @@
     </a:lvl9pPr>
   </p:defaultTextStyle>
 </p:presentation>
+</file>
+
+<file path=ppt/charts/chart1.xml><?xml version="1.0" encoding="utf-8"?>
+<c:chartSpace xmlns:c="http://schemas.openxmlformats.org/drawingml/2006/chart" xmlns:a="http://schemas.openxmlformats.org/drawingml/2006/main" xmlns:r="http://schemas.openxmlformats.org/officeDocument/2006/relationships">
+  <c:date1904 val="0"/>
+  <c:chart>
+    <c:autoTitleDeleted val="0"/>
+    <c:plotArea>
+      <c:barChart>
+        <c:barDir val="col"/>
+        <c:grouping val="clustered"/>
+        <c:ser>
+          <c:idx val="0"/>
+          <c:order val="0"/>
+          <c:tx>
+            <c:strRef>
+              <c:f>Sheet1!$B$1</c:f>
+              <c:strCache>
+                <c:ptCount val="1"/>
+                <c:pt idx="0">
+                  <c:v>First-line Rx Prohibited</c:v>
+                </c:pt>
+              </c:strCache>
+            </c:strRef>
+          </c:tx>
+          <c:spPr>
+            <a:solidFill>
+              <a:srgbClr val="EF5350"/>
+            </a:solidFill>
+          </c:spPr>
+          <c:cat>
+            <c:strRef>
+              <c:f>Sheet1!$A$2:$A$8</c:f>
+              <c:strCache>
+                <c:ptCount val="7"/>
+                <c:pt idx="0">
+                  <c:v>Male
+Hypogonadism</c:v>
+                </c:pt>
+                <c:pt idx="1">
+                  <c:v>ADHD</c:v>
+                </c:pt>
+                <c:pt idx="2">
+                  <c:v>PCOS/
+Fertility</c:v>
+                </c:pt>
+                <c:pt idx="3">
+                  <c:v>Cardiovascular</c:v>
+                </c:pt>
+                <c:pt idx="4">
+                  <c:v>Glucocorticoids</c:v>
+                </c:pt>
+                <c:pt idx="5">
+                  <c:v>Asthma</c:v>
+                </c:pt>
+                <c:pt idx="6">
+                  <c:v>Type 2 Diabetes
+/ GLP-1 RA</c:v>
+                </c:pt>
+              </c:strCache>
+            </c:strRef>
+          </c:cat>
+          <c:val>
+            <c:numRef>
+              <c:f>Sheet1!$B$2:$B$8</c:f>
+              <c:numCache>
+                <c:formatCode>General</c:formatCode>
+                <c:ptCount val="7"/>
+                <c:pt idx="0">
+                  <c:v>4</c:v>
+                </c:pt>
+                <c:pt idx="1">
+                  <c:v>4</c:v>
+                </c:pt>
+                <c:pt idx="2">
+                  <c:v>4</c:v>
+                </c:pt>
+                <c:pt idx="3">
+                  <c:v>3</c:v>
+                </c:pt>
+                <c:pt idx="4">
+                  <c:v>3</c:v>
+                </c:pt>
+                <c:pt idx="5">
+                  <c:v>2</c:v>
+                </c:pt>
+                <c:pt idx="6">
+                  <c:v>1</c:v>
+                </c:pt>
+              </c:numCache>
+            </c:numRef>
+          </c:val>
+        </c:ser>
+        <c:ser>
+          <c:idx val="1"/>
+          <c:order val="1"/>
+          <c:tx>
+            <c:strRef>
+              <c:f>Sheet1!$C$1</c:f>
+              <c:strCache>
+                <c:ptCount val="1"/>
+                <c:pt idx="0">
+                  <c:v>TUE Process Complexity</c:v>
+                </c:pt>
+              </c:strCache>
+            </c:strRef>
+          </c:tx>
+          <c:spPr>
+            <a:solidFill>
+              <a:srgbClr val="FF9800"/>
+            </a:solidFill>
+          </c:spPr>
+          <c:cat>
+            <c:strRef>
+              <c:f>Sheet1!$A$2:$A$8</c:f>
+              <c:strCache>
+                <c:ptCount val="7"/>
+                <c:pt idx="0">
+                  <c:v>Male
+Hypogonadism</c:v>
+                </c:pt>
+                <c:pt idx="1">
+                  <c:v>ADHD</c:v>
+                </c:pt>
+                <c:pt idx="2">
+                  <c:v>PCOS/
+Fertility</c:v>
+                </c:pt>
+                <c:pt idx="3">
+                  <c:v>Cardiovascular</c:v>
+                </c:pt>
+                <c:pt idx="4">
+                  <c:v>Glucocorticoids</c:v>
+                </c:pt>
+                <c:pt idx="5">
+                  <c:v>Asthma</c:v>
+                </c:pt>
+                <c:pt idx="6">
+                  <c:v>Type 2 Diabetes
+/ GLP-1 RA</c:v>
+                </c:pt>
+              </c:strCache>
+            </c:strRef>
+          </c:cat>
+          <c:val>
+            <c:numRef>
+              <c:f>Sheet1!$C$2:$C$8</c:f>
+              <c:numCache>
+                <c:formatCode>General</c:formatCode>
+                <c:ptCount val="7"/>
+                <c:pt idx="0">
+                  <c:v>4</c:v>
+                </c:pt>
+                <c:pt idx="1">
+                  <c:v>4</c:v>
+                </c:pt>
+                <c:pt idx="2">
+                  <c:v>3</c:v>
+                </c:pt>
+                <c:pt idx="3">
+                  <c:v>3</c:v>
+                </c:pt>
+                <c:pt idx="4">
+                  <c:v>2</c:v>
+                </c:pt>
+                <c:pt idx="5">
+                  <c:v>2</c:v>
+                </c:pt>
+                <c:pt idx="6">
+                  <c:v>2</c:v>
+                </c:pt>
+              </c:numCache>
+            </c:numRef>
+          </c:val>
+        </c:ser>
+        <c:ser>
+          <c:idx val="2"/>
+          <c:order val="2"/>
+          <c:tx>
+            <c:strRef>
+              <c:f>Sheet1!$D$1</c:f>
+              <c:strCache>
+                <c:ptCount val="1"/>
+                <c:pt idx="0">
+                  <c:v>Guideline Update Lag</c:v>
+                </c:pt>
+              </c:strCache>
+            </c:strRef>
+          </c:tx>
+          <c:spPr>
+            <a:solidFill>
+              <a:srgbClr val="FDD835"/>
+            </a:solidFill>
+          </c:spPr>
+          <c:cat>
+            <c:strRef>
+              <c:f>Sheet1!$A$2:$A$8</c:f>
+              <c:strCache>
+                <c:ptCount val="7"/>
+                <c:pt idx="0">
+                  <c:v>Male
+Hypogonadism</c:v>
+                </c:pt>
+                <c:pt idx="1">
+                  <c:v>ADHD</c:v>
+                </c:pt>
+                <c:pt idx="2">
+                  <c:v>PCOS/
+Fertility</c:v>
+                </c:pt>
+                <c:pt idx="3">
+                  <c:v>Cardiovascular</c:v>
+                </c:pt>
+                <c:pt idx="4">
+                  <c:v>Glucocorticoids</c:v>
+                </c:pt>
+                <c:pt idx="5">
+                  <c:v>Asthma</c:v>
+                </c:pt>
+                <c:pt idx="6">
+                  <c:v>Type 2 Diabetes
+/ GLP-1 RA</c:v>
+                </c:pt>
+              </c:strCache>
+            </c:strRef>
+          </c:cat>
+          <c:val>
+            <c:numRef>
+              <c:f>Sheet1!$D$2:$D$8</c:f>
+              <c:numCache>
+                <c:formatCode>General</c:formatCode>
+                <c:ptCount val="7"/>
+                <c:pt idx="0">
+                  <c:v>3</c:v>
+                </c:pt>
+                <c:pt idx="1">
+                  <c:v>2</c:v>
+                </c:pt>
+                <c:pt idx="2">
+                  <c:v>2</c:v>
+                </c:pt>
+                <c:pt idx="3">
+                  <c:v>3</c:v>
+                </c:pt>
+                <c:pt idx="4">
+                  <c:v>2</c:v>
+                </c:pt>
+                <c:pt idx="5">
+                  <c:v>2</c:v>
+                </c:pt>
+                <c:pt idx="6">
+                  <c:v>3</c:v>
+                </c:pt>
+              </c:numCache>
+            </c:numRef>
+          </c:val>
+        </c:ser>
+        <c:ser>
+          <c:idx val="3"/>
+          <c:order val="3"/>
+          <c:tx>
+            <c:strRef>
+              <c:f>Sheet1!$E$1</c:f>
+              <c:strCache>
+                <c:ptCount val="1"/>
+                <c:pt idx="0">
+                  <c:v>Athlete Impact</c:v>
+                </c:pt>
+              </c:strCache>
+            </c:strRef>
+          </c:tx>
+          <c:spPr>
+            <a:solidFill>
+              <a:srgbClr val="42A5F5"/>
+            </a:solidFill>
+          </c:spPr>
+          <c:cat>
+            <c:strRef>
+              <c:f>Sheet1!$A$2:$A$8</c:f>
+              <c:strCache>
+                <c:ptCount val="7"/>
+                <c:pt idx="0">
+                  <c:v>Male
+Hypogonadism</c:v>
+                </c:pt>
+                <c:pt idx="1">
+                  <c:v>ADHD</c:v>
+                </c:pt>
+                <c:pt idx="2">
+                  <c:v>PCOS/
+Fertility</c:v>
+                </c:pt>
+                <c:pt idx="3">
+                  <c:v>Cardiovascular</c:v>
+                </c:pt>
+                <c:pt idx="4">
+                  <c:v>Glucocorticoids</c:v>
+                </c:pt>
+                <c:pt idx="5">
+                  <c:v>Asthma</c:v>
+                </c:pt>
+                <c:pt idx="6">
+                  <c:v>Type 2 Diabetes
+/ GLP-1 RA</c:v>
+                </c:pt>
+              </c:strCache>
+            </c:strRef>
+          </c:cat>
+          <c:val>
+            <c:numRef>
+              <c:f>Sheet1!$E$2:$E$8</c:f>
+              <c:numCache>
+                <c:formatCode>General</c:formatCode>
+                <c:ptCount val="7"/>
+                <c:pt idx="0">
+                  <c:v>4</c:v>
+                </c:pt>
+                <c:pt idx="1">
+                  <c:v>4</c:v>
+                </c:pt>
+                <c:pt idx="2">
+                  <c:v>3</c:v>
+                </c:pt>
+                <c:pt idx="3">
+                  <c:v>3</c:v>
+                </c:pt>
+                <c:pt idx="4">
+                  <c:v>3</c:v>
+                </c:pt>
+                <c:pt idx="5">
+                  <c:v>3</c:v>
+                </c:pt>
+                <c:pt idx="6">
+                  <c:v>3</c:v>
+                </c:pt>
+              </c:numCache>
+            </c:numRef>
+          </c:val>
+        </c:ser>
+        <c:axId val="-2068027336"/>
+        <c:axId val="-2113994440"/>
+      </c:barChart>
+      <c:catAx>
+        <c:axId val="-2068027336"/>
+        <c:scaling>
+          <c:orientation val="minMax"/>
+        </c:scaling>
+        <c:delete val="0"/>
+        <c:axPos val="b"/>
+        <c:majorTickMark val="out"/>
+        <c:minorTickMark val="none"/>
+        <c:tickLblPos val="nextTo"/>
+        <c:crossAx val="-2113994440"/>
+        <c:crosses val="autoZero"/>
+        <c:auto val="1"/>
+        <c:lblAlgn val="ctr"/>
+        <c:lblOffset val="100"/>
+        <c:noMultiLvlLbl val="0"/>
+      </c:catAx>
+      <c:valAx>
+        <c:axId val="-2113994440"/>
+        <c:scaling>
+          <c:max val="4.5"/>
+          <c:min val="0.0"/>
+        </c:scaling>
+        <c:delete val="0"/>
+        <c:axPos val="l"/>
+        <c:majorGridlines/>
+        <c:majorTickMark val="out"/>
+        <c:minorTickMark val="none"/>
+        <c:tickLblPos val="nextTo"/>
+        <c:crossAx val="-2068027336"/>
+        <c:crosses val="autoZero"/>
+        <c:majorUnit val="1.0"/>
+      </c:valAx>
+    </c:plotArea>
+    <c:legend>
+      <c:overlay val="0"/>
+    </c:legend>
+    <c:dispBlanksAs val="gap"/>
+  </c:chart>
+  <c:txPr>
+    <a:bodyPr/>
+    <a:lstStyle/>
+    <a:p>
+      <a:pPr>
+        <a:defRPr sz="1800"/>
+      </a:pPr>
+      <a:endParaRPr lang="en-US"/>
+    </a:p>
+  </c:txPr>
+  <c:externalData r:id="rId1">
+    <c:autoUpdate val="0"/>
+  </c:externalData>
+</c:chartSpace>
 </file>
 
 <file path=ppt/slideLayouts/slideLayout1.xml><?xml version="1.0" encoding="utf-8"?>
@@ -3096,8 +3491,8 @@
         </p:nvSpPr>
         <p:spPr>
           <a:xfrm>
-            <a:off x="457200" y="91440"/>
-            <a:ext cx="11247120" cy="548640"/>
+            <a:off x="457200" y="137160"/>
+            <a:ext cx="11247120" cy="640080"/>
           </a:xfrm>
           <a:prstGeom prst="rect">
             <a:avLst/>
@@ -3112,7 +3507,7 @@
           <a:p>
             <a:pPr algn="ctr"/>
             <a:r>
-              <a:rPr b="1" sz="2000">
+              <a:rPr b="1" sz="1800">
                 <a:solidFill>
                   <a:srgbClr val="1B3A5C"/>
                 </a:solidFill>
@@ -3125,766 +3520,19 @@
       </p:sp>
       <p:graphicFrame>
         <p:nvGraphicFramePr>
-          <p:cNvPr id="3" name="Table 2"/>
+          <p:cNvPr id="3" name="Chart 2"/>
           <p:cNvGraphicFramePr>
             <a:graphicFrameLocks noGrp="1"/>
           </p:cNvGraphicFramePr>
           <p:nvPr/>
         </p:nvGraphicFramePr>
         <p:xfrm>
-          <a:off x="914400" y="1188720"/>
-          <a:ext cx="10332720" cy="4389120"/>
+          <a:off x="731520" y="914400"/>
+          <a:ext cx="10515600" cy="5029200"/>
         </p:xfrm>
         <a:graphic>
-          <a:graphicData uri="http://schemas.openxmlformats.org/drawingml/2006/table">
-            <a:tbl>
-              <a:tblPr firstRow="1" bandRow="1">
-                <a:tableStyleId>{5C22544A-7EE6-4342-B048-85BDC9FD1C3A}</a:tableStyleId>
-              </a:tblPr>
-              <a:tblGrid>
-                <a:gridCol w="3017520"/>
-                <a:gridCol w="1828800"/>
-                <a:gridCol w="1828800"/>
-                <a:gridCol w="1828800"/>
-                <a:gridCol w="1828800"/>
-              </a:tblGrid>
-              <a:tr h="548640">
-                <a:tc>
-                  <a:txBody>
-                    <a:bodyPr/>
-                    <a:lstStyle/>
-                    <a:p>
-                      <a:pPr algn="ctr"/>
-                      <a:r>
-                        <a:rPr sz="900" b="1"/>
-                        <a:t>Disease Area</a:t>
-                      </a:r>
-                    </a:p>
-                  </a:txBody>
-                  <a:tcPr anchor="ctr">
-                    <a:solidFill>
-                      <a:srgbClr val="E3F2FD"/>
-                    </a:solidFill>
-                  </a:tcPr>
-                </a:tc>
-                <a:tc>
-                  <a:txBody>
-                    <a:bodyPr/>
-                    <a:lstStyle/>
-                    <a:p>
-                      <a:pPr algn="ctr"/>
-                      <a:r>
-                        <a:rPr sz="900" b="1"/>
-                        <a:t>First-line Rx</a:t>
-                      </a:r>
-                    </a:p>
-                    <a:p>
-                      <a:pPr algn="ctr"/>
-                      <a:r>
-                        <a:rPr sz="900" b="1"/>
-                        <a:t>Prohibited</a:t>
-                      </a:r>
-                    </a:p>
-                  </a:txBody>
-                  <a:tcPr anchor="ctr">
-                    <a:solidFill>
-                      <a:srgbClr val="E3F2FD"/>
-                    </a:solidFill>
-                  </a:tcPr>
-                </a:tc>
-                <a:tc>
-                  <a:txBody>
-                    <a:bodyPr/>
-                    <a:lstStyle/>
-                    <a:p>
-                      <a:pPr algn="ctr"/>
-                      <a:r>
-                        <a:rPr sz="900" b="1"/>
-                        <a:t>TUE Process</a:t>
-                      </a:r>
-                    </a:p>
-                    <a:p>
-                      <a:pPr algn="ctr"/>
-                      <a:r>
-                        <a:rPr sz="900" b="1"/>
-                        <a:t>Complexity</a:t>
-                      </a:r>
-                    </a:p>
-                  </a:txBody>
-                  <a:tcPr anchor="ctr">
-                    <a:solidFill>
-                      <a:srgbClr val="E3F2FD"/>
-                    </a:solidFill>
-                  </a:tcPr>
-                </a:tc>
-                <a:tc>
-                  <a:txBody>
-                    <a:bodyPr/>
-                    <a:lstStyle/>
-                    <a:p>
-                      <a:pPr algn="ctr"/>
-                      <a:r>
-                        <a:rPr sz="900" b="1"/>
-                        <a:t>Guideline</a:t>
-                      </a:r>
-                    </a:p>
-                    <a:p>
-                      <a:pPr algn="ctr"/>
-                      <a:r>
-                        <a:rPr sz="900" b="1"/>
-                        <a:t>Update Lag</a:t>
-                      </a:r>
-                    </a:p>
-                  </a:txBody>
-                  <a:tcPr anchor="ctr">
-                    <a:solidFill>
-                      <a:srgbClr val="E3F2FD"/>
-                    </a:solidFill>
-                  </a:tcPr>
-                </a:tc>
-                <a:tc>
-                  <a:txBody>
-                    <a:bodyPr/>
-                    <a:lstStyle/>
-                    <a:p>
-                      <a:pPr algn="ctr"/>
-                      <a:r>
-                        <a:rPr sz="900" b="1"/>
-                        <a:t>Athlete</a:t>
-                      </a:r>
-                    </a:p>
-                    <a:p>
-                      <a:pPr algn="ctr"/>
-                      <a:r>
-                        <a:rPr sz="900" b="1"/>
-                        <a:t>Impact</a:t>
-                      </a:r>
-                    </a:p>
-                  </a:txBody>
-                  <a:tcPr anchor="ctr">
-                    <a:solidFill>
-                      <a:srgbClr val="E3F2FD"/>
-                    </a:solidFill>
-                  </a:tcPr>
-                </a:tc>
-              </a:tr>
-              <a:tr h="548640">
-                <a:tc>
-                  <a:txBody>
-                    <a:bodyPr/>
-                    <a:lstStyle/>
-                    <a:p>
-                      <a:pPr algn="ctr"/>
-                      <a:r>
-                        <a:rPr sz="1000" b="1"/>
-                        <a:t>Male Hypogonadism</a:t>
-                      </a:r>
-                    </a:p>
-                  </a:txBody>
-                  <a:tcPr anchor="ctr"/>
-                </a:tc>
-                <a:tc>
-                  <a:txBody>
-                    <a:bodyPr/>
-                    <a:lstStyle/>
-                    <a:p>
-                      <a:pPr algn="ctr"/>
-                      <a:r>
-                        <a:rPr sz="1000" b="0"/>
-                        <a:t>Very High (4)</a:t>
-                      </a:r>
-                    </a:p>
-                  </a:txBody>
-                  <a:tcPr anchor="ctr">
-                    <a:solidFill>
-                      <a:srgbClr val="EF5350"/>
-                    </a:solidFill>
-                  </a:tcPr>
-                </a:tc>
-                <a:tc>
-                  <a:txBody>
-                    <a:bodyPr/>
-                    <a:lstStyle/>
-                    <a:p>
-                      <a:pPr algn="ctr"/>
-                      <a:r>
-                        <a:rPr sz="1000" b="0"/>
-                        <a:t>Very High (4)</a:t>
-                      </a:r>
-                    </a:p>
-                  </a:txBody>
-                  <a:tcPr anchor="ctr">
-                    <a:solidFill>
-                      <a:srgbClr val="FF9800"/>
-                    </a:solidFill>
-                  </a:tcPr>
-                </a:tc>
-                <a:tc>
-                  <a:txBody>
-                    <a:bodyPr/>
-                    <a:lstStyle/>
-                    <a:p>
-                      <a:pPr algn="ctr"/>
-                      <a:r>
-                        <a:rPr sz="1000" b="0"/>
-                        <a:t>High (3)</a:t>
-                      </a:r>
-                    </a:p>
-                  </a:txBody>
-                  <a:tcPr anchor="ctr">
-                    <a:solidFill>
-                      <a:srgbClr val="FDE167"/>
-                    </a:solidFill>
-                  </a:tcPr>
-                </a:tc>
-                <a:tc>
-                  <a:txBody>
-                    <a:bodyPr/>
-                    <a:lstStyle/>
-                    <a:p>
-                      <a:pPr algn="ctr"/>
-                      <a:r>
-                        <a:rPr sz="1000" b="0"/>
-                        <a:t>Very High (4)</a:t>
-                      </a:r>
-                    </a:p>
-                  </a:txBody>
-                  <a:tcPr anchor="ctr">
-                    <a:solidFill>
-                      <a:srgbClr val="42A5F5"/>
-                    </a:solidFill>
-                  </a:tcPr>
-                </a:tc>
-              </a:tr>
-              <a:tr h="548640">
-                <a:tc>
-                  <a:txBody>
-                    <a:bodyPr/>
-                    <a:lstStyle/>
-                    <a:p>
-                      <a:pPr algn="ctr"/>
-                      <a:r>
-                        <a:rPr sz="1000" b="1"/>
-                        <a:t>ADHD</a:t>
-                      </a:r>
-                    </a:p>
-                  </a:txBody>
-                  <a:tcPr anchor="ctr"/>
-                </a:tc>
-                <a:tc>
-                  <a:txBody>
-                    <a:bodyPr/>
-                    <a:lstStyle/>
-                    <a:p>
-                      <a:pPr algn="ctr"/>
-                      <a:r>
-                        <a:rPr sz="1000" b="0"/>
-                        <a:t>Very High (4)</a:t>
-                      </a:r>
-                    </a:p>
-                  </a:txBody>
-                  <a:tcPr anchor="ctr">
-                    <a:solidFill>
-                      <a:srgbClr val="EF5350"/>
-                    </a:solidFill>
-                  </a:tcPr>
-                </a:tc>
-                <a:tc>
-                  <a:txBody>
-                    <a:bodyPr/>
-                    <a:lstStyle/>
-                    <a:p>
-                      <a:pPr algn="ctr"/>
-                      <a:r>
-                        <a:rPr sz="1000" b="0"/>
-                        <a:t>Very High (4)</a:t>
-                      </a:r>
-                    </a:p>
-                  </a:txBody>
-                  <a:tcPr anchor="ctr">
-                    <a:solidFill>
-                      <a:srgbClr val="FF9800"/>
-                    </a:solidFill>
-                  </a:tcPr>
-                </a:tc>
-                <a:tc>
-                  <a:txBody>
-                    <a:bodyPr/>
-                    <a:lstStyle/>
-                    <a:p>
-                      <a:pPr algn="ctr"/>
-                      <a:r>
-                        <a:rPr sz="1000" b="0"/>
-                        <a:t>Medium (2)</a:t>
-                      </a:r>
-                    </a:p>
-                  </a:txBody>
-                  <a:tcPr anchor="ctr">
-                    <a:solidFill>
-                      <a:srgbClr val="FEEB9A"/>
-                    </a:solidFill>
-                  </a:tcPr>
-                </a:tc>
-                <a:tc>
-                  <a:txBody>
-                    <a:bodyPr/>
-                    <a:lstStyle/>
-                    <a:p>
-                      <a:pPr algn="ctr"/>
-                      <a:r>
-                        <a:rPr sz="1000" b="0"/>
-                        <a:t>Very High (4)</a:t>
-                      </a:r>
-                    </a:p>
-                  </a:txBody>
-                  <a:tcPr anchor="ctr">
-                    <a:solidFill>
-                      <a:srgbClr val="42A5F5"/>
-                    </a:solidFill>
-                  </a:tcPr>
-                </a:tc>
-              </a:tr>
-              <a:tr h="548640">
-                <a:tc>
-                  <a:txBody>
-                    <a:bodyPr/>
-                    <a:lstStyle/>
-                    <a:p>
-                      <a:pPr algn="ctr"/>
-                      <a:r>
-                        <a:rPr sz="1000" b="1"/>
-                        <a:t>PCOS/Fertility</a:t>
-                      </a:r>
-                    </a:p>
-                  </a:txBody>
-                  <a:tcPr anchor="ctr"/>
-                </a:tc>
-                <a:tc>
-                  <a:txBody>
-                    <a:bodyPr/>
-                    <a:lstStyle/>
-                    <a:p>
-                      <a:pPr algn="ctr"/>
-                      <a:r>
-                        <a:rPr sz="1000" b="0"/>
-                        <a:t>Very High (4)</a:t>
-                      </a:r>
-                    </a:p>
-                  </a:txBody>
-                  <a:tcPr anchor="ctr">
-                    <a:solidFill>
-                      <a:srgbClr val="EF5350"/>
-                    </a:solidFill>
-                  </a:tcPr>
-                </a:tc>
-                <a:tc>
-                  <a:txBody>
-                    <a:bodyPr/>
-                    <a:lstStyle/>
-                    <a:p>
-                      <a:pPr algn="ctr"/>
-                      <a:r>
-                        <a:rPr sz="1000" b="0"/>
-                        <a:t>High (3)</a:t>
-                      </a:r>
-                    </a:p>
-                  </a:txBody>
-                  <a:tcPr anchor="ctr">
-                    <a:solidFill>
-                      <a:srgbClr val="FFB13F"/>
-                    </a:solidFill>
-                  </a:tcPr>
-                </a:tc>
-                <a:tc>
-                  <a:txBody>
-                    <a:bodyPr/>
-                    <a:lstStyle/>
-                    <a:p>
-                      <a:pPr algn="ctr"/>
-                      <a:r>
-                        <a:rPr sz="1000" b="0"/>
-                        <a:t>Medium (2)</a:t>
-                      </a:r>
-                    </a:p>
-                  </a:txBody>
-                  <a:tcPr anchor="ctr">
-                    <a:solidFill>
-                      <a:srgbClr val="FEEB9A"/>
-                    </a:solidFill>
-                  </a:tcPr>
-                </a:tc>
-                <a:tc>
-                  <a:txBody>
-                    <a:bodyPr/>
-                    <a:lstStyle/>
-                    <a:p>
-                      <a:pPr algn="ctr"/>
-                      <a:r>
-                        <a:rPr sz="1000" b="0"/>
-                        <a:t>High (3)</a:t>
-                      </a:r>
-                    </a:p>
-                  </a:txBody>
-                  <a:tcPr anchor="ctr">
-                    <a:solidFill>
-                      <a:srgbClr val="71BBF7"/>
-                    </a:solidFill>
-                  </a:tcPr>
-                </a:tc>
-              </a:tr>
-              <a:tr h="548640">
-                <a:tc>
-                  <a:txBody>
-                    <a:bodyPr/>
-                    <a:lstStyle/>
-                    <a:p>
-                      <a:pPr algn="ctr"/>
-                      <a:r>
-                        <a:rPr sz="1000" b="1"/>
-                        <a:t>Cardiovascular</a:t>
-                      </a:r>
-                    </a:p>
-                  </a:txBody>
-                  <a:tcPr anchor="ctr"/>
-                </a:tc>
-                <a:tc>
-                  <a:txBody>
-                    <a:bodyPr/>
-                    <a:lstStyle/>
-                    <a:p>
-                      <a:pPr algn="ctr"/>
-                      <a:r>
-                        <a:rPr sz="1000" b="0"/>
-                        <a:t>High (3)</a:t>
-                      </a:r>
-                    </a:p>
-                  </a:txBody>
-                  <a:tcPr anchor="ctr">
-                    <a:solidFill>
-                      <a:srgbClr val="F37E7B"/>
-                    </a:solidFill>
-                  </a:tcPr>
-                </a:tc>
-                <a:tc>
-                  <a:txBody>
-                    <a:bodyPr/>
-                    <a:lstStyle/>
-                    <a:p>
-                      <a:pPr algn="ctr"/>
-                      <a:r>
-                        <a:rPr sz="1000" b="0"/>
-                        <a:t>High (3)</a:t>
-                      </a:r>
-                    </a:p>
-                  </a:txBody>
-                  <a:tcPr anchor="ctr">
-                    <a:solidFill>
-                      <a:srgbClr val="FFB13F"/>
-                    </a:solidFill>
-                  </a:tcPr>
-                </a:tc>
-                <a:tc>
-                  <a:txBody>
-                    <a:bodyPr/>
-                    <a:lstStyle/>
-                    <a:p>
-                      <a:pPr algn="ctr"/>
-                      <a:r>
-                        <a:rPr sz="1000" b="0"/>
-                        <a:t>High (3)</a:t>
-                      </a:r>
-                    </a:p>
-                  </a:txBody>
-                  <a:tcPr anchor="ctr">
-                    <a:solidFill>
-                      <a:srgbClr val="FDE167"/>
-                    </a:solidFill>
-                  </a:tcPr>
-                </a:tc>
-                <a:tc>
-                  <a:txBody>
-                    <a:bodyPr/>
-                    <a:lstStyle/>
-                    <a:p>
-                      <a:pPr algn="ctr"/>
-                      <a:r>
-                        <a:rPr sz="1000" b="0"/>
-                        <a:t>High (3)</a:t>
-                      </a:r>
-                    </a:p>
-                  </a:txBody>
-                  <a:tcPr anchor="ctr">
-                    <a:solidFill>
-                      <a:srgbClr val="71BBF7"/>
-                    </a:solidFill>
-                  </a:tcPr>
-                </a:tc>
-              </a:tr>
-              <a:tr h="548640">
-                <a:tc>
-                  <a:txBody>
-                    <a:bodyPr/>
-                    <a:lstStyle/>
-                    <a:p>
-                      <a:pPr algn="ctr"/>
-                      <a:r>
-                        <a:rPr sz="1000" b="1"/>
-                        <a:t>Glucocorticoids</a:t>
-                      </a:r>
-                    </a:p>
-                  </a:txBody>
-                  <a:tcPr anchor="ctr"/>
-                </a:tc>
-                <a:tc>
-                  <a:txBody>
-                    <a:bodyPr/>
-                    <a:lstStyle/>
-                    <a:p>
-                      <a:pPr algn="ctr"/>
-                      <a:r>
-                        <a:rPr sz="1000" b="0"/>
-                        <a:t>High (3)</a:t>
-                      </a:r>
-                    </a:p>
-                  </a:txBody>
-                  <a:tcPr anchor="ctr">
-                    <a:solidFill>
-                      <a:srgbClr val="F37E7B"/>
-                    </a:solidFill>
-                  </a:tcPr>
-                </a:tc>
-                <a:tc>
-                  <a:txBody>
-                    <a:bodyPr/>
-                    <a:lstStyle/>
-                    <a:p>
-                      <a:pPr algn="ctr"/>
-                      <a:r>
-                        <a:rPr sz="1000" b="0"/>
-                        <a:t>Medium (2)</a:t>
-                      </a:r>
-                    </a:p>
-                  </a:txBody>
-                  <a:tcPr anchor="ctr">
-                    <a:solidFill>
-                      <a:srgbClr val="FFCB7F"/>
-                    </a:solidFill>
-                  </a:tcPr>
-                </a:tc>
-                <a:tc>
-                  <a:txBody>
-                    <a:bodyPr/>
-                    <a:lstStyle/>
-                    <a:p>
-                      <a:pPr algn="ctr"/>
-                      <a:r>
-                        <a:rPr sz="1000" b="0"/>
-                        <a:t>Medium (2)</a:t>
-                      </a:r>
-                    </a:p>
-                  </a:txBody>
-                  <a:tcPr anchor="ctr">
-                    <a:solidFill>
-                      <a:srgbClr val="FEEB9A"/>
-                    </a:solidFill>
-                  </a:tcPr>
-                </a:tc>
-                <a:tc>
-                  <a:txBody>
-                    <a:bodyPr/>
-                    <a:lstStyle/>
-                    <a:p>
-                      <a:pPr algn="ctr"/>
-                      <a:r>
-                        <a:rPr sz="1000" b="0"/>
-                        <a:t>High (3)</a:t>
-                      </a:r>
-                    </a:p>
-                  </a:txBody>
-                  <a:tcPr anchor="ctr">
-                    <a:solidFill>
-                      <a:srgbClr val="71BBF7"/>
-                    </a:solidFill>
-                  </a:tcPr>
-                </a:tc>
-              </a:tr>
-              <a:tr h="548640">
-                <a:tc>
-                  <a:txBody>
-                    <a:bodyPr/>
-                    <a:lstStyle/>
-                    <a:p>
-                      <a:pPr algn="ctr"/>
-                      <a:r>
-                        <a:rPr sz="1000" b="1"/>
-                        <a:t>Asthma</a:t>
-                      </a:r>
-                    </a:p>
-                  </a:txBody>
-                  <a:tcPr anchor="ctr"/>
-                </a:tc>
-                <a:tc>
-                  <a:txBody>
-                    <a:bodyPr/>
-                    <a:lstStyle/>
-                    <a:p>
-                      <a:pPr algn="ctr"/>
-                      <a:r>
-                        <a:rPr sz="1000" b="0"/>
-                        <a:t>Medium (2)</a:t>
-                      </a:r>
-                    </a:p>
-                  </a:txBody>
-                  <a:tcPr anchor="ctr">
-                    <a:solidFill>
-                      <a:srgbClr val="F7A9A7"/>
-                    </a:solidFill>
-                  </a:tcPr>
-                </a:tc>
-                <a:tc>
-                  <a:txBody>
-                    <a:bodyPr/>
-                    <a:lstStyle/>
-                    <a:p>
-                      <a:pPr algn="ctr"/>
-                      <a:r>
-                        <a:rPr sz="1000" b="0"/>
-                        <a:t>Medium (2)</a:t>
-                      </a:r>
-                    </a:p>
-                  </a:txBody>
-                  <a:tcPr anchor="ctr">
-                    <a:solidFill>
-                      <a:srgbClr val="FFCB7F"/>
-                    </a:solidFill>
-                  </a:tcPr>
-                </a:tc>
-                <a:tc>
-                  <a:txBody>
-                    <a:bodyPr/>
-                    <a:lstStyle/>
-                    <a:p>
-                      <a:pPr algn="ctr"/>
-                      <a:r>
-                        <a:rPr sz="1000" b="0"/>
-                        <a:t>Medium (2)</a:t>
-                      </a:r>
-                    </a:p>
-                  </a:txBody>
-                  <a:tcPr anchor="ctr">
-                    <a:solidFill>
-                      <a:srgbClr val="FEEB9A"/>
-                    </a:solidFill>
-                  </a:tcPr>
-                </a:tc>
-                <a:tc>
-                  <a:txBody>
-                    <a:bodyPr/>
-                    <a:lstStyle/>
-                    <a:p>
-                      <a:pPr algn="ctr"/>
-                      <a:r>
-                        <a:rPr sz="1000" b="0"/>
-                        <a:t>High (3)</a:t>
-                      </a:r>
-                    </a:p>
-                  </a:txBody>
-                  <a:tcPr anchor="ctr">
-                    <a:solidFill>
-                      <a:srgbClr val="71BBF7"/>
-                    </a:solidFill>
-                  </a:tcPr>
-                </a:tc>
-              </a:tr>
-              <a:tr h="548640">
-                <a:tc>
-                  <a:txBody>
-                    <a:bodyPr/>
-                    <a:lstStyle/>
-                    <a:p>
-                      <a:pPr algn="ctr"/>
-                      <a:r>
-                        <a:rPr sz="1000" b="1"/>
-                        <a:t>Type 2 Diabetes / GLP-1 RA</a:t>
-                      </a:r>
-                    </a:p>
-                  </a:txBody>
-                  <a:tcPr anchor="ctr"/>
-                </a:tc>
-                <a:tc>
-                  <a:txBody>
-                    <a:bodyPr/>
-                    <a:lstStyle/>
-                    <a:p>
-                      <a:pPr algn="ctr"/>
-                      <a:r>
-                        <a:rPr sz="1000" b="0"/>
-                        <a:t>Low (1)</a:t>
-                      </a:r>
-                    </a:p>
-                  </a:txBody>
-                  <a:tcPr anchor="ctr">
-                    <a:solidFill>
-                      <a:srgbClr val="FBD4D3"/>
-                    </a:solidFill>
-                  </a:tcPr>
-                </a:tc>
-                <a:tc>
-                  <a:txBody>
-                    <a:bodyPr/>
-                    <a:lstStyle/>
-                    <a:p>
-                      <a:pPr algn="ctr"/>
-                      <a:r>
-                        <a:rPr sz="1000" b="0"/>
-                        <a:t>Medium (2)</a:t>
-                      </a:r>
-                    </a:p>
-                  </a:txBody>
-                  <a:tcPr anchor="ctr">
-                    <a:solidFill>
-                      <a:srgbClr val="FFCB7F"/>
-                    </a:solidFill>
-                  </a:tcPr>
-                </a:tc>
-                <a:tc>
-                  <a:txBody>
-                    <a:bodyPr/>
-                    <a:lstStyle/>
-                    <a:p>
-                      <a:pPr algn="ctr"/>
-                      <a:r>
-                        <a:rPr sz="1000" b="0"/>
-                        <a:t>High (3)</a:t>
-                      </a:r>
-                    </a:p>
-                  </a:txBody>
-                  <a:tcPr anchor="ctr">
-                    <a:solidFill>
-                      <a:srgbClr val="FDE167"/>
-                    </a:solidFill>
-                  </a:tcPr>
-                </a:tc>
-                <a:tc>
-                  <a:txBody>
-                    <a:bodyPr/>
-                    <a:lstStyle/>
-                    <a:p>
-                      <a:pPr algn="ctr"/>
-                      <a:r>
-                        <a:rPr sz="1000" b="0"/>
-                        <a:t>High (3)</a:t>
-                      </a:r>
-                    </a:p>
-                  </a:txBody>
-                  <a:tcPr anchor="ctr">
-                    <a:solidFill>
-                      <a:srgbClr val="71BBF7"/>
-                    </a:solidFill>
-                  </a:tcPr>
-                </a:tc>
-              </a:tr>
-            </a:tbl>
+          <a:graphicData uri="http://schemas.openxmlformats.org/drawingml/2006/chart">
+            <c:chart xmlns:c="http://schemas.openxmlformats.org/drawingml/2006/chart" r:id="rId2"/>
           </a:graphicData>
         </a:graphic>
       </p:graphicFrame>
@@ -3896,8 +3544,8 @@
         </p:nvSpPr>
         <p:spPr>
           <a:xfrm>
-            <a:off x="914400" y="5760720"/>
-            <a:ext cx="10058400" cy="365760"/>
+            <a:off x="457200" y="6126480"/>
+            <a:ext cx="11247120" cy="365760"/>
           </a:xfrm>
           <a:prstGeom prst="rect">
             <a:avLst/>
@@ -3905,36 +3553,6 @@
           <a:noFill/>
         </p:spPr>
         <p:txBody>
-          <a:bodyPr wrap="none">
-            <a:spAutoFit/>
-          </a:bodyPr>
-          <a:lstStyle/>
-          <a:p>
-            <a:pPr algn="ctr"/>
-            <a:r>
-              <a:rPr sz="1000" i="1"/>
-              <a:t>Severity Scale: None (0) | Low (1) | Medium (2) | High (3) | Very High (4)</a:t>
-            </a:r>
-          </a:p>
-        </p:txBody>
-      </p:sp>
-      <p:sp>
-        <p:nvSpPr>
-          <p:cNvPr id="5" name="TextBox 4"/>
-          <p:cNvSpPr txBox="1"/>
-          <p:nvPr/>
-        </p:nvSpPr>
-        <p:spPr>
-          <a:xfrm>
-            <a:off x="457200" y="6217920"/>
-            <a:ext cx="11247120" cy="548640"/>
-          </a:xfrm>
-          <a:prstGeom prst="rect">
-            <a:avLst/>
-          </a:prstGeom>
-          <a:noFill/>
-        </p:spPr>
-        <p:txBody>
           <a:bodyPr wrap="square">
             <a:spAutoFit/>
           </a:bodyPr>
@@ -3942,12 +3560,13 @@
           <a:p>
             <a:pPr algn="ctr"/>
             <a:r>
-              <a:rPr sz="1200" i="1">
+              <a:rPr sz="1100" i="1">
                 <a:solidFill>
                   <a:srgbClr val="424242"/>
                 </a:solidFill>
               </a:rPr>
-              <a:t>Figure 5. Clinical-competition gap severity by disease area and assessment dimension.</a:t>
+              <a:t>Figure 5. Clinical-competition gap severity by disease area and assessment dimension.
+Severity: None (0), Low (1), Medium (2), High (3), Very High (4).</a:t>
             </a:r>
           </a:p>
         </p:txBody>
